--- a/Seminar ppt/논문 프로젝트7_테스트 기능 구현2025-05-13.pptx
+++ b/Seminar ppt/논문 프로젝트7_테스트 기능 구현2025-05-13.pptx
@@ -5,7 +5,7 @@
     <p:sldMasterId id="2147483750" r:id="rId1"/>
   </p:sldMasterIdLst>
   <p:notesMasterIdLst>
-    <p:notesMasterId r:id="rId21"/>
+    <p:notesMasterId r:id="rId20"/>
   </p:notesMasterIdLst>
   <p:sldIdLst>
     <p:sldId id="258" r:id="rId2"/>
@@ -24,9 +24,8 @@
     <p:sldId id="273" r:id="rId15"/>
     <p:sldId id="274" r:id="rId16"/>
     <p:sldId id="266" r:id="rId17"/>
-    <p:sldId id="276" r:id="rId18"/>
-    <p:sldId id="267" r:id="rId19"/>
-    <p:sldId id="260" r:id="rId20"/>
+    <p:sldId id="267" r:id="rId18"/>
+    <p:sldId id="260" r:id="rId19"/>
   </p:sldIdLst>
   <p:sldSz cx="9144000" cy="6858000" type="screen4x3"/>
   <p:notesSz cx="6797675" cy="9874250"/>
@@ -1045,6 +1044,90 @@
     <p:extLst>
       <p:ext uri="{BB962C8B-B14F-4D97-AF65-F5344CB8AC3E}">
         <p14:creationId xmlns:p14="http://schemas.microsoft.com/office/powerpoint/2010/main" val="2710787087"/>
+      </p:ext>
+    </p:extLst>
+  </p:cSld>
+  <p:clrMapOvr>
+    <a:masterClrMapping/>
+  </p:clrMapOvr>
+</p:notes>
+</file>
+
+<file path=ppt/notesSlides/notesSlide7.xml><?xml version="1.0" encoding="utf-8"?>
+<p:notes xmlns:a="http://schemas.openxmlformats.org/drawingml/2006/main" xmlns:r="http://schemas.openxmlformats.org/officeDocument/2006/relationships" xmlns:p="http://schemas.openxmlformats.org/presentationml/2006/main">
+  <p:cSld>
+    <p:spTree>
+      <p:nvGrpSpPr>
+        <p:cNvPr id="1" name=""/>
+        <p:cNvGrpSpPr/>
+        <p:nvPr/>
+      </p:nvGrpSpPr>
+      <p:grpSpPr>
+        <a:xfrm>
+          <a:off x="0" y="0"/>
+          <a:ext cx="0" cy="0"/>
+          <a:chOff x="0" y="0"/>
+          <a:chExt cx="0" cy="0"/>
+        </a:xfrm>
+      </p:grpSpPr>
+      <p:sp>
+        <p:nvSpPr>
+          <p:cNvPr id="2" name="슬라이드 이미지 개체 틀 1"/>
+          <p:cNvSpPr>
+            <a:spLocks noGrp="1" noRot="1" noChangeAspect="1"/>
+          </p:cNvSpPr>
+          <p:nvPr>
+            <p:ph type="sldImg"/>
+          </p:nvPr>
+        </p:nvSpPr>
+        <p:spPr/>
+      </p:sp>
+      <p:sp>
+        <p:nvSpPr>
+          <p:cNvPr id="3" name="슬라이드 노트 개체 틀 2"/>
+          <p:cNvSpPr>
+            <a:spLocks noGrp="1"/>
+          </p:cNvSpPr>
+          <p:nvPr>
+            <p:ph type="body" idx="1"/>
+          </p:nvPr>
+        </p:nvSpPr>
+        <p:spPr/>
+        <p:txBody>
+          <a:bodyPr/>
+          <a:lstStyle/>
+          <a:p>
+            <a:endParaRPr lang="ko-KR" altLang="en-US" dirty="0"/>
+          </a:p>
+        </p:txBody>
+      </p:sp>
+      <p:sp>
+        <p:nvSpPr>
+          <p:cNvPr id="4" name="슬라이드 번호 개체 틀 3"/>
+          <p:cNvSpPr>
+            <a:spLocks noGrp="1"/>
+          </p:cNvSpPr>
+          <p:nvPr>
+            <p:ph type="sldNum" sz="quarter" idx="5"/>
+          </p:nvPr>
+        </p:nvSpPr>
+        <p:spPr/>
+        <p:txBody>
+          <a:bodyPr/>
+          <a:lstStyle/>
+          <a:p>
+            <a:fld id="{420F09F9-D812-4758-8566-A65BCCCBDD8F}" type="slidenum">
+              <a:rPr lang="ko-KR" altLang="en-US" smtClean="0"/>
+              <a:t>17</a:t>
+            </a:fld>
+            <a:endParaRPr lang="ko-KR" altLang="en-US"/>
+          </a:p>
+        </p:txBody>
+      </p:sp>
+    </p:spTree>
+    <p:extLst>
+      <p:ext uri="{BB962C8B-B14F-4D97-AF65-F5344CB8AC3E}">
+        <p14:creationId xmlns:p14="http://schemas.microsoft.com/office/powerpoint/2010/main" val="889958524"/>
       </p:ext>
     </p:extLst>
   </p:cSld>
@@ -4915,7 +4998,7 @@
         <p:spPr>
           <a:xfrm>
             <a:off x="-123" y="887972"/>
-            <a:ext cx="5231890" cy="4557252"/>
+            <a:ext cx="5004171" cy="4557252"/>
           </a:xfrm>
         </p:spPr>
       </p:pic>
@@ -4940,8 +5023,8 @@
         </p:blipFill>
         <p:spPr>
           <a:xfrm>
-            <a:off x="4211960" y="31211"/>
-            <a:ext cx="4896544" cy="6858000"/>
+            <a:off x="4104333" y="31211"/>
+            <a:ext cx="5004171" cy="6858000"/>
           </a:xfrm>
           <a:prstGeom prst="rect">
             <a:avLst/>
@@ -4977,6 +5060,142 @@
           </a:prstGeom>
         </p:spPr>
       </p:pic>
+      <p:cxnSp>
+        <p:nvCxnSpPr>
+          <p:cNvPr id="3" name="직선 연결선 2">
+            <a:extLst>
+              <a:ext uri="{FF2B5EF4-FFF2-40B4-BE49-F238E27FC236}">
+                <a16:creationId xmlns:a16="http://schemas.microsoft.com/office/drawing/2014/main" id="{904A8C57-B220-C115-98A6-8D4D46B81193}"/>
+              </a:ext>
+            </a:extLst>
+          </p:cNvPr>
+          <p:cNvCxnSpPr/>
+          <p:nvPr/>
+        </p:nvCxnSpPr>
+        <p:spPr>
+          <a:xfrm>
+            <a:off x="5231767" y="188640"/>
+            <a:ext cx="936104" cy="0"/>
+          </a:xfrm>
+          <a:prstGeom prst="line">
+            <a:avLst/>
+          </a:prstGeom>
+          <a:solidFill>
+            <a:schemeClr val="accent1"/>
+          </a:solidFill>
+          <a:ln w="28575" cap="flat" cmpd="sng" algn="ctr">
+            <a:solidFill>
+              <a:srgbClr val="FF0000"/>
+            </a:solidFill>
+            <a:prstDash val="solid"/>
+            <a:round/>
+          </a:ln>
+          <a:effectLst/>
+        </p:spPr>
+      </p:cxnSp>
+      <p:cxnSp>
+        <p:nvCxnSpPr>
+          <p:cNvPr id="4" name="직선 연결선 3">
+            <a:extLst>
+              <a:ext uri="{FF2B5EF4-FFF2-40B4-BE49-F238E27FC236}">
+                <a16:creationId xmlns:a16="http://schemas.microsoft.com/office/drawing/2014/main" id="{1FA4533A-A24C-3BEF-FA33-EB846F551F92}"/>
+              </a:ext>
+            </a:extLst>
+          </p:cNvPr>
+          <p:cNvCxnSpPr>
+            <a:cxnSpLocks/>
+          </p:cNvCxnSpPr>
+          <p:nvPr/>
+        </p:nvCxnSpPr>
+        <p:spPr>
+          <a:xfrm>
+            <a:off x="4932040" y="6093296"/>
+            <a:ext cx="1512168" cy="0"/>
+          </a:xfrm>
+          <a:prstGeom prst="line">
+            <a:avLst/>
+          </a:prstGeom>
+          <a:solidFill>
+            <a:schemeClr val="accent1"/>
+          </a:solidFill>
+          <a:ln w="28575" cap="flat" cmpd="sng" algn="ctr">
+            <a:solidFill>
+              <a:srgbClr val="FF0000"/>
+            </a:solidFill>
+            <a:prstDash val="solid"/>
+            <a:round/>
+          </a:ln>
+          <a:effectLst/>
+        </p:spPr>
+      </p:cxnSp>
+      <p:cxnSp>
+        <p:nvCxnSpPr>
+          <p:cNvPr id="8" name="직선 연결선 7">
+            <a:extLst>
+              <a:ext uri="{FF2B5EF4-FFF2-40B4-BE49-F238E27FC236}">
+                <a16:creationId xmlns:a16="http://schemas.microsoft.com/office/drawing/2014/main" id="{A7489137-FC4F-0569-4B40-86E6538069EC}"/>
+              </a:ext>
+            </a:extLst>
+          </p:cNvPr>
+          <p:cNvCxnSpPr/>
+          <p:nvPr/>
+        </p:nvCxnSpPr>
+        <p:spPr>
+          <a:xfrm>
+            <a:off x="1403648" y="6278321"/>
+            <a:ext cx="936104" cy="0"/>
+          </a:xfrm>
+          <a:prstGeom prst="line">
+            <a:avLst/>
+          </a:prstGeom>
+          <a:solidFill>
+            <a:schemeClr val="accent1"/>
+          </a:solidFill>
+          <a:ln w="28575" cap="flat" cmpd="sng" algn="ctr">
+            <a:solidFill>
+              <a:srgbClr val="FF0000"/>
+            </a:solidFill>
+            <a:prstDash val="solid"/>
+            <a:round/>
+          </a:ln>
+          <a:effectLst/>
+        </p:spPr>
+      </p:cxnSp>
+      <p:cxnSp>
+        <p:nvCxnSpPr>
+          <p:cNvPr id="10" name="직선 연결선 9">
+            <a:extLst>
+              <a:ext uri="{FF2B5EF4-FFF2-40B4-BE49-F238E27FC236}">
+                <a16:creationId xmlns:a16="http://schemas.microsoft.com/office/drawing/2014/main" id="{86BA0D34-82C8-55DC-5AD1-62A533B780E0}"/>
+              </a:ext>
+            </a:extLst>
+          </p:cNvPr>
+          <p:cNvCxnSpPr>
+            <a:cxnSpLocks/>
+          </p:cNvCxnSpPr>
+          <p:nvPr/>
+        </p:nvCxnSpPr>
+        <p:spPr>
+          <a:xfrm>
+            <a:off x="4644008" y="4077072"/>
+            <a:ext cx="3168352" cy="0"/>
+          </a:xfrm>
+          <a:prstGeom prst="line">
+            <a:avLst/>
+          </a:prstGeom>
+          <a:solidFill>
+            <a:schemeClr val="accent1"/>
+          </a:solidFill>
+          <a:ln w="28575" cap="flat" cmpd="sng" algn="ctr">
+            <a:solidFill>
+              <a:srgbClr val="FF0000"/>
+            </a:solidFill>
+            <a:prstDash val="solid"/>
+            <a:round/>
+          </a:ln>
+          <a:effectLst/>
+        </p:spPr>
+      </p:cxnSp>
     </p:spTree>
     <p:extLst>
       <p:ext uri="{BB962C8B-B14F-4D97-AF65-F5344CB8AC3E}">
@@ -7029,86 +7248,6 @@
           <a:chExt cx="0" cy="0"/>
         </a:xfrm>
       </p:grpSpPr>
-      <p:sp>
-        <p:nvSpPr>
-          <p:cNvPr id="2" name="제목 1">
-            <a:extLst>
-              <a:ext uri="{FF2B5EF4-FFF2-40B4-BE49-F238E27FC236}">
-                <a16:creationId xmlns:a16="http://schemas.microsoft.com/office/drawing/2014/main" id="{ECC3CF87-65DA-B8E7-A190-8E07B96B2895}"/>
-              </a:ext>
-            </a:extLst>
-          </p:cNvPr>
-          <p:cNvSpPr>
-            <a:spLocks noGrp="1"/>
-          </p:cNvSpPr>
-          <p:nvPr>
-            <p:ph type="title"/>
-          </p:nvPr>
-        </p:nvSpPr>
-        <p:spPr/>
-        <p:txBody>
-          <a:bodyPr/>
-          <a:lstStyle/>
-          <a:p>
-            <a:endParaRPr lang="ko-KR" altLang="en-US"/>
-          </a:p>
-        </p:txBody>
-      </p:sp>
-      <p:sp>
-        <p:nvSpPr>
-          <p:cNvPr id="7" name="내용 개체 틀 6">
-            <a:extLst>
-              <a:ext uri="{FF2B5EF4-FFF2-40B4-BE49-F238E27FC236}">
-                <a16:creationId xmlns:a16="http://schemas.microsoft.com/office/drawing/2014/main" id="{29C7453D-2DB9-570F-C3B0-6DB2E30D604E}"/>
-              </a:ext>
-            </a:extLst>
-          </p:cNvPr>
-          <p:cNvSpPr>
-            <a:spLocks noGrp="1"/>
-          </p:cNvSpPr>
-          <p:nvPr>
-            <p:ph idx="1"/>
-          </p:nvPr>
-        </p:nvSpPr>
-        <p:spPr/>
-        <p:txBody>
-          <a:bodyPr/>
-          <a:lstStyle/>
-          <a:p>
-            <a:endParaRPr lang="ko-KR" altLang="en-US"/>
-          </a:p>
-        </p:txBody>
-      </p:sp>
-    </p:spTree>
-    <p:extLst>
-      <p:ext uri="{BB962C8B-B14F-4D97-AF65-F5344CB8AC3E}">
-        <p14:creationId xmlns:p14="http://schemas.microsoft.com/office/powerpoint/2010/main" val="700493661"/>
-      </p:ext>
-    </p:extLst>
-  </p:cSld>
-  <p:clrMapOvr>
-    <a:masterClrMapping/>
-  </p:clrMapOvr>
-</p:sld>
-</file>
-
-<file path=ppt/slides/slide18.xml><?xml version="1.0" encoding="utf-8"?>
-<p:sld xmlns:a="http://schemas.openxmlformats.org/drawingml/2006/main" xmlns:r="http://schemas.openxmlformats.org/officeDocument/2006/relationships" xmlns:p="http://schemas.openxmlformats.org/presentationml/2006/main">
-  <p:cSld>
-    <p:spTree>
-      <p:nvGrpSpPr>
-        <p:cNvPr id="1" name=""/>
-        <p:cNvGrpSpPr/>
-        <p:nvPr/>
-      </p:nvGrpSpPr>
-      <p:grpSpPr>
-        <a:xfrm>
-          <a:off x="0" y="0"/>
-          <a:ext cx="0" cy="0"/>
-          <a:chOff x="0" y="0"/>
-          <a:chExt cx="0" cy="0"/>
-        </a:xfrm>
-      </p:grpSpPr>
       <p:pic>
         <p:nvPicPr>
           <p:cNvPr id="7" name="그림 6">
@@ -7124,14 +7263,14 @@
           <p:nvPr/>
         </p:nvPicPr>
         <p:blipFill>
-          <a:blip r:embed="rId2"/>
-          <a:srcRect l="3008"/>
+          <a:blip r:embed="rId3"/>
+          <a:srcRect l="3008" b="898"/>
           <a:stretch/>
         </p:blipFill>
         <p:spPr>
           <a:xfrm>
-            <a:off x="4283968" y="790390"/>
-            <a:ext cx="4860032" cy="6078492"/>
+            <a:off x="3851920" y="692696"/>
+            <a:ext cx="5292080" cy="6165304"/>
           </a:xfrm>
           <a:prstGeom prst="rect">
             <a:avLst/>
@@ -7184,8 +7323,8 @@
         </p:nvSpPr>
         <p:spPr>
           <a:xfrm>
-            <a:off x="867839" y="908720"/>
-            <a:ext cx="8096649" cy="4248472"/>
+            <a:off x="323528" y="908720"/>
+            <a:ext cx="8640961" cy="4248472"/>
           </a:xfrm>
         </p:spPr>
         <p:txBody>
@@ -7343,7 +7482,7 @@
 </p:sld>
 </file>
 
-<file path=ppt/slides/slide19.xml><?xml version="1.0" encoding="utf-8"?>
+<file path=ppt/slides/slide18.xml><?xml version="1.0" encoding="utf-8"?>
 <p:sld xmlns:a="http://schemas.openxmlformats.org/drawingml/2006/main" xmlns:r="http://schemas.openxmlformats.org/officeDocument/2006/relationships" xmlns:p="http://schemas.openxmlformats.org/presentationml/2006/main">
   <p:cSld>
     <p:spTree>
